--- a/public/videos/repositories/my-dartslive/my-dartslive-tech-preview.pptx
+++ b/public/videos/repositories/my-dartslive/my-dartslive-tech-preview.pptx
@@ -134,7 +134,7 @@
           <p:cNvPr id="2" name="タイトル 1">
             <a:extLst>
               <a:ext uri="{FF2B5EF4-FFF2-40B4-BE49-F238E27FC236}">
-                <a16:creationId xmlns:a16="http://schemas.microsoft.com/office/drawing/2014/main" id="{C36B1134-BAB2-F66E-DEA4-7BF728D3AED4}"/>
+                <a16:creationId xmlns:a16="http://schemas.microsoft.com/office/drawing/2014/main" id="{04E1BBD1-9D20-010B-DB77-B178694D18CB}"/>
               </a:ext>
             </a:extLst>
           </p:cNvPr>
@@ -171,7 +171,7 @@
           <p:cNvPr id="3" name="字幕 2">
             <a:extLst>
               <a:ext uri="{FF2B5EF4-FFF2-40B4-BE49-F238E27FC236}">
-                <a16:creationId xmlns:a16="http://schemas.microsoft.com/office/drawing/2014/main" id="{2CA469D7-E5A8-7012-570A-D8A8E1EE6655}"/>
+                <a16:creationId xmlns:a16="http://schemas.microsoft.com/office/drawing/2014/main" id="{8D9207B1-257F-29C1-3C48-4F90E19BA8DA}"/>
               </a:ext>
             </a:extLst>
           </p:cNvPr>
@@ -241,7 +241,7 @@
           <p:cNvPr id="4" name="日付プレースホルダー 3">
             <a:extLst>
               <a:ext uri="{FF2B5EF4-FFF2-40B4-BE49-F238E27FC236}">
-                <a16:creationId xmlns:a16="http://schemas.microsoft.com/office/drawing/2014/main" id="{1D6BB876-1769-0A28-0C64-B319DB2324EB}"/>
+                <a16:creationId xmlns:a16="http://schemas.microsoft.com/office/drawing/2014/main" id="{99C74497-04E8-FD05-70D1-5BBFEF8A002D}"/>
               </a:ext>
             </a:extLst>
           </p:cNvPr>
@@ -257,7 +257,7 @@
           <a:bodyPr/>
           <a:lstStyle/>
           <a:p>
-            <a:fld id="{DB0110F2-E0DB-4B37-B3E7-8325D69EFD10}" type="datetimeFigureOut">
+            <a:fld id="{EDA80CF3-97CF-41C8-B522-D06A973D3A44}" type="datetimeFigureOut">
               <a:rPr kumimoji="1" lang="ja-JP" altLang="en-US" smtClean="0"/>
               <a:t>2026/7/30</a:t>
             </a:fld>
@@ -270,7 +270,7 @@
           <p:cNvPr id="5" name="フッター プレースホルダー 4">
             <a:extLst>
               <a:ext uri="{FF2B5EF4-FFF2-40B4-BE49-F238E27FC236}">
-                <a16:creationId xmlns:a16="http://schemas.microsoft.com/office/drawing/2014/main" id="{88041102-F1CF-45FF-DFDA-AC18D4610A22}"/>
+                <a16:creationId xmlns:a16="http://schemas.microsoft.com/office/drawing/2014/main" id="{516B09F0-16DB-E6D1-C725-2AFB305F1993}"/>
               </a:ext>
             </a:extLst>
           </p:cNvPr>
@@ -295,7 +295,7 @@
           <p:cNvPr id="6" name="スライド番号プレースホルダー 5">
             <a:extLst>
               <a:ext uri="{FF2B5EF4-FFF2-40B4-BE49-F238E27FC236}">
-                <a16:creationId xmlns:a16="http://schemas.microsoft.com/office/drawing/2014/main" id="{F8A88589-A2C3-20EF-8216-97C08E111CBF}"/>
+                <a16:creationId xmlns:a16="http://schemas.microsoft.com/office/drawing/2014/main" id="{4C36512A-247F-686E-0A9A-6087810B08F7}"/>
               </a:ext>
             </a:extLst>
           </p:cNvPr>
@@ -311,7 +311,7 @@
           <a:bodyPr/>
           <a:lstStyle/>
           <a:p>
-            <a:fld id="{EE5077F7-6B8A-4C44-A0FF-72090273D9A4}" type="slidenum">
+            <a:fld id="{8F9E6F0C-AD0F-4915-A7B1-7B0B363ED78D}" type="slidenum">
               <a:rPr kumimoji="1" lang="ja-JP" altLang="en-US" smtClean="0"/>
               <a:t>‹#›</a:t>
             </a:fld>
@@ -322,7 +322,7 @@
     </p:spTree>
     <p:extLst>
       <p:ext uri="{BB962C8B-B14F-4D97-AF65-F5344CB8AC3E}">
-        <p14:creationId xmlns:p14="http://schemas.microsoft.com/office/powerpoint/2010/main" val="20025007"/>
+        <p14:creationId xmlns:p14="http://schemas.microsoft.com/office/powerpoint/2010/main" val="4252131357"/>
       </p:ext>
     </p:extLst>
   </p:cSld>
@@ -354,7 +354,7 @@
           <p:cNvPr id="2" name="タイトル 1">
             <a:extLst>
               <a:ext uri="{FF2B5EF4-FFF2-40B4-BE49-F238E27FC236}">
-                <a16:creationId xmlns:a16="http://schemas.microsoft.com/office/drawing/2014/main" id="{763AEBB2-9CC3-0DB2-A349-BA2FE96F2ACF}"/>
+                <a16:creationId xmlns:a16="http://schemas.microsoft.com/office/drawing/2014/main" id="{D7C682A0-924A-BCC5-9C6D-213AD2DDFF1A}"/>
               </a:ext>
             </a:extLst>
           </p:cNvPr>
@@ -382,7 +382,7 @@
           <p:cNvPr id="3" name="縦書きテキスト プレースホルダー 2">
             <a:extLst>
               <a:ext uri="{FF2B5EF4-FFF2-40B4-BE49-F238E27FC236}">
-                <a16:creationId xmlns:a16="http://schemas.microsoft.com/office/drawing/2014/main" id="{9C44E0B2-16C7-881A-C70B-BA8131A12DDB}"/>
+                <a16:creationId xmlns:a16="http://schemas.microsoft.com/office/drawing/2014/main" id="{394BE867-01CD-CD66-2436-C52A0CF0CFC2}"/>
               </a:ext>
             </a:extLst>
           </p:cNvPr>
@@ -471,7 +471,7 @@
           <p:cNvPr id="4" name="日付プレースホルダー 3">
             <a:extLst>
               <a:ext uri="{FF2B5EF4-FFF2-40B4-BE49-F238E27FC236}">
-                <a16:creationId xmlns:a16="http://schemas.microsoft.com/office/drawing/2014/main" id="{48227744-1686-6B16-E8C3-2F8406CA52B8}"/>
+                <a16:creationId xmlns:a16="http://schemas.microsoft.com/office/drawing/2014/main" id="{EB4EEEA9-6D3F-B3A6-688D-0992544BF647}"/>
               </a:ext>
             </a:extLst>
           </p:cNvPr>
@@ -487,7 +487,7 @@
           <a:bodyPr/>
           <a:lstStyle/>
           <a:p>
-            <a:fld id="{DB0110F2-E0DB-4B37-B3E7-8325D69EFD10}" type="datetimeFigureOut">
+            <a:fld id="{EDA80CF3-97CF-41C8-B522-D06A973D3A44}" type="datetimeFigureOut">
               <a:rPr kumimoji="1" lang="ja-JP" altLang="en-US" smtClean="0"/>
               <a:t>2026/7/30</a:t>
             </a:fld>
@@ -500,7 +500,7 @@
           <p:cNvPr id="5" name="フッター プレースホルダー 4">
             <a:extLst>
               <a:ext uri="{FF2B5EF4-FFF2-40B4-BE49-F238E27FC236}">
-                <a16:creationId xmlns:a16="http://schemas.microsoft.com/office/drawing/2014/main" id="{1CA8F992-8B46-823A-8E40-333781D6B8A7}"/>
+                <a16:creationId xmlns:a16="http://schemas.microsoft.com/office/drawing/2014/main" id="{A3A64756-9892-826B-7B87-A11B0437F34C}"/>
               </a:ext>
             </a:extLst>
           </p:cNvPr>
@@ -525,7 +525,7 @@
           <p:cNvPr id="6" name="スライド番号プレースホルダー 5">
             <a:extLst>
               <a:ext uri="{FF2B5EF4-FFF2-40B4-BE49-F238E27FC236}">
-                <a16:creationId xmlns:a16="http://schemas.microsoft.com/office/drawing/2014/main" id="{6D30465D-247F-6195-4491-A68765687A33}"/>
+                <a16:creationId xmlns:a16="http://schemas.microsoft.com/office/drawing/2014/main" id="{565E804A-9C7A-6B1D-900F-485CEC4A8A99}"/>
               </a:ext>
             </a:extLst>
           </p:cNvPr>
@@ -541,7 +541,7 @@
           <a:bodyPr/>
           <a:lstStyle/>
           <a:p>
-            <a:fld id="{EE5077F7-6B8A-4C44-A0FF-72090273D9A4}" type="slidenum">
+            <a:fld id="{8F9E6F0C-AD0F-4915-A7B1-7B0B363ED78D}" type="slidenum">
               <a:rPr kumimoji="1" lang="ja-JP" altLang="en-US" smtClean="0"/>
               <a:t>‹#›</a:t>
             </a:fld>
@@ -552,7 +552,7 @@
     </p:spTree>
     <p:extLst>
       <p:ext uri="{BB962C8B-B14F-4D97-AF65-F5344CB8AC3E}">
-        <p14:creationId xmlns:p14="http://schemas.microsoft.com/office/powerpoint/2010/main" val="2479706465"/>
+        <p14:creationId xmlns:p14="http://schemas.microsoft.com/office/powerpoint/2010/main" val="2811336727"/>
       </p:ext>
     </p:extLst>
   </p:cSld>
@@ -584,7 +584,7 @@
           <p:cNvPr id="2" name="縦書きタイトル 1">
             <a:extLst>
               <a:ext uri="{FF2B5EF4-FFF2-40B4-BE49-F238E27FC236}">
-                <a16:creationId xmlns:a16="http://schemas.microsoft.com/office/drawing/2014/main" id="{761578CA-2D50-AC03-B5E2-AD54F68B2932}"/>
+                <a16:creationId xmlns:a16="http://schemas.microsoft.com/office/drawing/2014/main" id="{2900763A-9D96-37F4-49DD-D8A7BBECC3B9}"/>
               </a:ext>
             </a:extLst>
           </p:cNvPr>
@@ -617,7 +617,7 @@
           <p:cNvPr id="3" name="縦書きテキスト プレースホルダー 2">
             <a:extLst>
               <a:ext uri="{FF2B5EF4-FFF2-40B4-BE49-F238E27FC236}">
-                <a16:creationId xmlns:a16="http://schemas.microsoft.com/office/drawing/2014/main" id="{3D00D127-0D39-29C4-3997-0B1D2586F81E}"/>
+                <a16:creationId xmlns:a16="http://schemas.microsoft.com/office/drawing/2014/main" id="{E30656FE-0E67-D9EC-5A3B-37A3053AFDAA}"/>
               </a:ext>
             </a:extLst>
           </p:cNvPr>
@@ -711,7 +711,7 @@
           <p:cNvPr id="4" name="日付プレースホルダー 3">
             <a:extLst>
               <a:ext uri="{FF2B5EF4-FFF2-40B4-BE49-F238E27FC236}">
-                <a16:creationId xmlns:a16="http://schemas.microsoft.com/office/drawing/2014/main" id="{DDCC2CA6-CDE6-7BB2-EF29-089C1EA87457}"/>
+                <a16:creationId xmlns:a16="http://schemas.microsoft.com/office/drawing/2014/main" id="{4E888C2E-4CA9-AB4E-1A56-B07699F69C20}"/>
               </a:ext>
             </a:extLst>
           </p:cNvPr>
@@ -727,7 +727,7 @@
           <a:bodyPr/>
           <a:lstStyle/>
           <a:p>
-            <a:fld id="{DB0110F2-E0DB-4B37-B3E7-8325D69EFD10}" type="datetimeFigureOut">
+            <a:fld id="{EDA80CF3-97CF-41C8-B522-D06A973D3A44}" type="datetimeFigureOut">
               <a:rPr kumimoji="1" lang="ja-JP" altLang="en-US" smtClean="0"/>
               <a:t>2026/7/30</a:t>
             </a:fld>
@@ -740,7 +740,7 @@
           <p:cNvPr id="5" name="フッター プレースホルダー 4">
             <a:extLst>
               <a:ext uri="{FF2B5EF4-FFF2-40B4-BE49-F238E27FC236}">
-                <a16:creationId xmlns:a16="http://schemas.microsoft.com/office/drawing/2014/main" id="{A7FF1D4E-9182-075C-1F6B-AC598FB33A7F}"/>
+                <a16:creationId xmlns:a16="http://schemas.microsoft.com/office/drawing/2014/main" id="{036D8F0A-96FC-1998-D64F-B03CC0B8F49A}"/>
               </a:ext>
             </a:extLst>
           </p:cNvPr>
@@ -765,7 +765,7 @@
           <p:cNvPr id="6" name="スライド番号プレースホルダー 5">
             <a:extLst>
               <a:ext uri="{FF2B5EF4-FFF2-40B4-BE49-F238E27FC236}">
-                <a16:creationId xmlns:a16="http://schemas.microsoft.com/office/drawing/2014/main" id="{CC51CFDF-108B-045F-1A18-433EA9B0CDD7}"/>
+                <a16:creationId xmlns:a16="http://schemas.microsoft.com/office/drawing/2014/main" id="{712A5482-EDDF-5D68-78DC-E3A333006818}"/>
               </a:ext>
             </a:extLst>
           </p:cNvPr>
@@ -781,7 +781,7 @@
           <a:bodyPr/>
           <a:lstStyle/>
           <a:p>
-            <a:fld id="{EE5077F7-6B8A-4C44-A0FF-72090273D9A4}" type="slidenum">
+            <a:fld id="{8F9E6F0C-AD0F-4915-A7B1-7B0B363ED78D}" type="slidenum">
               <a:rPr kumimoji="1" lang="ja-JP" altLang="en-US" smtClean="0"/>
               <a:t>‹#›</a:t>
             </a:fld>
@@ -792,7 +792,7 @@
     </p:spTree>
     <p:extLst>
       <p:ext uri="{BB962C8B-B14F-4D97-AF65-F5344CB8AC3E}">
-        <p14:creationId xmlns:p14="http://schemas.microsoft.com/office/powerpoint/2010/main" val="713576666"/>
+        <p14:creationId xmlns:p14="http://schemas.microsoft.com/office/powerpoint/2010/main" val="575648204"/>
       </p:ext>
     </p:extLst>
   </p:cSld>
@@ -824,7 +824,7 @@
           <p:cNvPr id="2" name="タイトル 1">
             <a:extLst>
               <a:ext uri="{FF2B5EF4-FFF2-40B4-BE49-F238E27FC236}">
-                <a16:creationId xmlns:a16="http://schemas.microsoft.com/office/drawing/2014/main" id="{04B01852-5B7B-C58A-72C3-8DBF37ADCBE7}"/>
+                <a16:creationId xmlns:a16="http://schemas.microsoft.com/office/drawing/2014/main" id="{4AFC7EB4-911C-C48A-DE6B-F5E8F17ACBBA}"/>
               </a:ext>
             </a:extLst>
           </p:cNvPr>
@@ -852,7 +852,7 @@
           <p:cNvPr id="3" name="コンテンツ プレースホルダー 2">
             <a:extLst>
               <a:ext uri="{FF2B5EF4-FFF2-40B4-BE49-F238E27FC236}">
-                <a16:creationId xmlns:a16="http://schemas.microsoft.com/office/drawing/2014/main" id="{FB3E54FF-19D6-D99F-9D6A-822329DAF445}"/>
+                <a16:creationId xmlns:a16="http://schemas.microsoft.com/office/drawing/2014/main" id="{14D83238-D026-CB30-2A5D-E573575ED6B1}"/>
               </a:ext>
             </a:extLst>
           </p:cNvPr>
@@ -941,7 +941,7 @@
           <p:cNvPr id="4" name="日付プレースホルダー 3">
             <a:extLst>
               <a:ext uri="{FF2B5EF4-FFF2-40B4-BE49-F238E27FC236}">
-                <a16:creationId xmlns:a16="http://schemas.microsoft.com/office/drawing/2014/main" id="{5C052B78-6E40-065D-2DF8-06D6EF9747B3}"/>
+                <a16:creationId xmlns:a16="http://schemas.microsoft.com/office/drawing/2014/main" id="{99C30985-8A89-B624-BAB3-909B49E8FE2B}"/>
               </a:ext>
             </a:extLst>
           </p:cNvPr>
@@ -957,7 +957,7 @@
           <a:bodyPr/>
           <a:lstStyle/>
           <a:p>
-            <a:fld id="{DB0110F2-E0DB-4B37-B3E7-8325D69EFD10}" type="datetimeFigureOut">
+            <a:fld id="{EDA80CF3-97CF-41C8-B522-D06A973D3A44}" type="datetimeFigureOut">
               <a:rPr kumimoji="1" lang="ja-JP" altLang="en-US" smtClean="0"/>
               <a:t>2026/7/30</a:t>
             </a:fld>
@@ -970,7 +970,7 @@
           <p:cNvPr id="5" name="フッター プレースホルダー 4">
             <a:extLst>
               <a:ext uri="{FF2B5EF4-FFF2-40B4-BE49-F238E27FC236}">
-                <a16:creationId xmlns:a16="http://schemas.microsoft.com/office/drawing/2014/main" id="{E882B039-EBCA-F629-9112-6EFD52E6F0F9}"/>
+                <a16:creationId xmlns:a16="http://schemas.microsoft.com/office/drawing/2014/main" id="{6DC4A752-0CC8-2C63-7427-66D8D5926227}"/>
               </a:ext>
             </a:extLst>
           </p:cNvPr>
@@ -995,7 +995,7 @@
           <p:cNvPr id="6" name="スライド番号プレースホルダー 5">
             <a:extLst>
               <a:ext uri="{FF2B5EF4-FFF2-40B4-BE49-F238E27FC236}">
-                <a16:creationId xmlns:a16="http://schemas.microsoft.com/office/drawing/2014/main" id="{53EE3DE1-0657-5E59-3931-716AA7D27F49}"/>
+                <a16:creationId xmlns:a16="http://schemas.microsoft.com/office/drawing/2014/main" id="{9BCE4D4E-1B7A-9314-53E1-760CA719EB6B}"/>
               </a:ext>
             </a:extLst>
           </p:cNvPr>
@@ -1011,7 +1011,7 @@
           <a:bodyPr/>
           <a:lstStyle/>
           <a:p>
-            <a:fld id="{EE5077F7-6B8A-4C44-A0FF-72090273D9A4}" type="slidenum">
+            <a:fld id="{8F9E6F0C-AD0F-4915-A7B1-7B0B363ED78D}" type="slidenum">
               <a:rPr kumimoji="1" lang="ja-JP" altLang="en-US" smtClean="0"/>
               <a:t>‹#›</a:t>
             </a:fld>
@@ -1022,7 +1022,7 @@
     </p:spTree>
     <p:extLst>
       <p:ext uri="{BB962C8B-B14F-4D97-AF65-F5344CB8AC3E}">
-        <p14:creationId xmlns:p14="http://schemas.microsoft.com/office/powerpoint/2010/main" val="2268744611"/>
+        <p14:creationId xmlns:p14="http://schemas.microsoft.com/office/powerpoint/2010/main" val="846735712"/>
       </p:ext>
     </p:extLst>
   </p:cSld>
@@ -1054,7 +1054,7 @@
           <p:cNvPr id="2" name="タイトル 1">
             <a:extLst>
               <a:ext uri="{FF2B5EF4-FFF2-40B4-BE49-F238E27FC236}">
-                <a16:creationId xmlns:a16="http://schemas.microsoft.com/office/drawing/2014/main" id="{43FBA438-6FD2-EB60-5E5D-CE0432A459CC}"/>
+                <a16:creationId xmlns:a16="http://schemas.microsoft.com/office/drawing/2014/main" id="{725C2D0B-0315-B2AC-1676-F7FD2556170D}"/>
               </a:ext>
             </a:extLst>
           </p:cNvPr>
@@ -1091,7 +1091,7 @@
           <p:cNvPr id="3" name="テキスト プレースホルダー 2">
             <a:extLst>
               <a:ext uri="{FF2B5EF4-FFF2-40B4-BE49-F238E27FC236}">
-                <a16:creationId xmlns:a16="http://schemas.microsoft.com/office/drawing/2014/main" id="{5B81229E-C8AF-0F7D-0DB7-060454A477C6}"/>
+                <a16:creationId xmlns:a16="http://schemas.microsoft.com/office/drawing/2014/main" id="{689A6122-8A83-42A9-9203-B9319A197C78}"/>
               </a:ext>
             </a:extLst>
           </p:cNvPr>
@@ -1216,7 +1216,7 @@
           <p:cNvPr id="4" name="日付プレースホルダー 3">
             <a:extLst>
               <a:ext uri="{FF2B5EF4-FFF2-40B4-BE49-F238E27FC236}">
-                <a16:creationId xmlns:a16="http://schemas.microsoft.com/office/drawing/2014/main" id="{2C4A5152-7B10-C773-840F-10C7EB5D0A53}"/>
+                <a16:creationId xmlns:a16="http://schemas.microsoft.com/office/drawing/2014/main" id="{CB73700C-0A31-8143-4F0A-1B69CE11C6AE}"/>
               </a:ext>
             </a:extLst>
           </p:cNvPr>
@@ -1232,7 +1232,7 @@
           <a:bodyPr/>
           <a:lstStyle/>
           <a:p>
-            <a:fld id="{DB0110F2-E0DB-4B37-B3E7-8325D69EFD10}" type="datetimeFigureOut">
+            <a:fld id="{EDA80CF3-97CF-41C8-B522-D06A973D3A44}" type="datetimeFigureOut">
               <a:rPr kumimoji="1" lang="ja-JP" altLang="en-US" smtClean="0"/>
               <a:t>2026/7/30</a:t>
             </a:fld>
@@ -1245,7 +1245,7 @@
           <p:cNvPr id="5" name="フッター プレースホルダー 4">
             <a:extLst>
               <a:ext uri="{FF2B5EF4-FFF2-40B4-BE49-F238E27FC236}">
-                <a16:creationId xmlns:a16="http://schemas.microsoft.com/office/drawing/2014/main" id="{345A893D-A53F-D24F-C507-ED6B84B5B258}"/>
+                <a16:creationId xmlns:a16="http://schemas.microsoft.com/office/drawing/2014/main" id="{6D224FB3-C0F4-27DC-BFAA-B9A53A591202}"/>
               </a:ext>
             </a:extLst>
           </p:cNvPr>
@@ -1270,7 +1270,7 @@
           <p:cNvPr id="6" name="スライド番号プレースホルダー 5">
             <a:extLst>
               <a:ext uri="{FF2B5EF4-FFF2-40B4-BE49-F238E27FC236}">
-                <a16:creationId xmlns:a16="http://schemas.microsoft.com/office/drawing/2014/main" id="{DB9E39E3-63F0-2E10-9093-FF8E26FE1074}"/>
+                <a16:creationId xmlns:a16="http://schemas.microsoft.com/office/drawing/2014/main" id="{CF34561D-4DFB-C85D-6576-811C8BB88648}"/>
               </a:ext>
             </a:extLst>
           </p:cNvPr>
@@ -1286,7 +1286,7 @@
           <a:bodyPr/>
           <a:lstStyle/>
           <a:p>
-            <a:fld id="{EE5077F7-6B8A-4C44-A0FF-72090273D9A4}" type="slidenum">
+            <a:fld id="{8F9E6F0C-AD0F-4915-A7B1-7B0B363ED78D}" type="slidenum">
               <a:rPr kumimoji="1" lang="ja-JP" altLang="en-US" smtClean="0"/>
               <a:t>‹#›</a:t>
             </a:fld>
@@ -1297,7 +1297,7 @@
     </p:spTree>
     <p:extLst>
       <p:ext uri="{BB962C8B-B14F-4D97-AF65-F5344CB8AC3E}">
-        <p14:creationId xmlns:p14="http://schemas.microsoft.com/office/powerpoint/2010/main" val="922177275"/>
+        <p14:creationId xmlns:p14="http://schemas.microsoft.com/office/powerpoint/2010/main" val="2277416865"/>
       </p:ext>
     </p:extLst>
   </p:cSld>
@@ -1329,7 +1329,7 @@
           <p:cNvPr id="2" name="タイトル 1">
             <a:extLst>
               <a:ext uri="{FF2B5EF4-FFF2-40B4-BE49-F238E27FC236}">
-                <a16:creationId xmlns:a16="http://schemas.microsoft.com/office/drawing/2014/main" id="{82B38407-FED4-DA8F-968F-46EAF376695C}"/>
+                <a16:creationId xmlns:a16="http://schemas.microsoft.com/office/drawing/2014/main" id="{CCF1493A-E242-3219-CDAC-056F242397E0}"/>
               </a:ext>
             </a:extLst>
           </p:cNvPr>
@@ -1357,7 +1357,7 @@
           <p:cNvPr id="3" name="コンテンツ プレースホルダー 2">
             <a:extLst>
               <a:ext uri="{FF2B5EF4-FFF2-40B4-BE49-F238E27FC236}">
-                <a16:creationId xmlns:a16="http://schemas.microsoft.com/office/drawing/2014/main" id="{FF3312DF-9757-64C4-0969-E6F5A971CD38}"/>
+                <a16:creationId xmlns:a16="http://schemas.microsoft.com/office/drawing/2014/main" id="{4D0F84AC-3C19-03A2-C7C7-81A299F570B8}"/>
               </a:ext>
             </a:extLst>
           </p:cNvPr>
@@ -1451,7 +1451,7 @@
           <p:cNvPr id="4" name="コンテンツ プレースホルダー 3">
             <a:extLst>
               <a:ext uri="{FF2B5EF4-FFF2-40B4-BE49-F238E27FC236}">
-                <a16:creationId xmlns:a16="http://schemas.microsoft.com/office/drawing/2014/main" id="{DA95D0EB-3DB7-5A87-2A7A-3876274AE74F}"/>
+                <a16:creationId xmlns:a16="http://schemas.microsoft.com/office/drawing/2014/main" id="{848E9C70-B441-1466-361A-C31656FAE0DE}"/>
               </a:ext>
             </a:extLst>
           </p:cNvPr>
@@ -1545,7 +1545,7 @@
           <p:cNvPr id="5" name="日付プレースホルダー 4">
             <a:extLst>
               <a:ext uri="{FF2B5EF4-FFF2-40B4-BE49-F238E27FC236}">
-                <a16:creationId xmlns:a16="http://schemas.microsoft.com/office/drawing/2014/main" id="{0DDA503A-FBAC-4EBC-1684-2A607F864487}"/>
+                <a16:creationId xmlns:a16="http://schemas.microsoft.com/office/drawing/2014/main" id="{D327EC9E-4F3D-7582-DC6F-3B4AD75BF1E3}"/>
               </a:ext>
             </a:extLst>
           </p:cNvPr>
@@ -1561,7 +1561,7 @@
           <a:bodyPr/>
           <a:lstStyle/>
           <a:p>
-            <a:fld id="{DB0110F2-E0DB-4B37-B3E7-8325D69EFD10}" type="datetimeFigureOut">
+            <a:fld id="{EDA80CF3-97CF-41C8-B522-D06A973D3A44}" type="datetimeFigureOut">
               <a:rPr kumimoji="1" lang="ja-JP" altLang="en-US" smtClean="0"/>
               <a:t>2026/7/30</a:t>
             </a:fld>
@@ -1574,7 +1574,7 @@
           <p:cNvPr id="6" name="フッター プレースホルダー 5">
             <a:extLst>
               <a:ext uri="{FF2B5EF4-FFF2-40B4-BE49-F238E27FC236}">
-                <a16:creationId xmlns:a16="http://schemas.microsoft.com/office/drawing/2014/main" id="{DC205F63-F016-C235-024C-A9B4729DB66F}"/>
+                <a16:creationId xmlns:a16="http://schemas.microsoft.com/office/drawing/2014/main" id="{045E0EA3-53AB-25C8-B3CF-B9C812B9F94E}"/>
               </a:ext>
             </a:extLst>
           </p:cNvPr>
@@ -1599,7 +1599,7 @@
           <p:cNvPr id="7" name="スライド番号プレースホルダー 6">
             <a:extLst>
               <a:ext uri="{FF2B5EF4-FFF2-40B4-BE49-F238E27FC236}">
-                <a16:creationId xmlns:a16="http://schemas.microsoft.com/office/drawing/2014/main" id="{41A34287-85A1-94A7-9D57-FDED93F47E85}"/>
+                <a16:creationId xmlns:a16="http://schemas.microsoft.com/office/drawing/2014/main" id="{D11D8A75-241D-8998-0875-11837BBC00DD}"/>
               </a:ext>
             </a:extLst>
           </p:cNvPr>
@@ -1615,7 +1615,7 @@
           <a:bodyPr/>
           <a:lstStyle/>
           <a:p>
-            <a:fld id="{EE5077F7-6B8A-4C44-A0FF-72090273D9A4}" type="slidenum">
+            <a:fld id="{8F9E6F0C-AD0F-4915-A7B1-7B0B363ED78D}" type="slidenum">
               <a:rPr kumimoji="1" lang="ja-JP" altLang="en-US" smtClean="0"/>
               <a:t>‹#›</a:t>
             </a:fld>
@@ -1626,7 +1626,7 @@
     </p:spTree>
     <p:extLst>
       <p:ext uri="{BB962C8B-B14F-4D97-AF65-F5344CB8AC3E}">
-        <p14:creationId xmlns:p14="http://schemas.microsoft.com/office/powerpoint/2010/main" val="3652227966"/>
+        <p14:creationId xmlns:p14="http://schemas.microsoft.com/office/powerpoint/2010/main" val="4220250839"/>
       </p:ext>
     </p:extLst>
   </p:cSld>
@@ -1658,7 +1658,7 @@
           <p:cNvPr id="2" name="タイトル 1">
             <a:extLst>
               <a:ext uri="{FF2B5EF4-FFF2-40B4-BE49-F238E27FC236}">
-                <a16:creationId xmlns:a16="http://schemas.microsoft.com/office/drawing/2014/main" id="{C0671856-5080-A7D1-B33F-92C92F53703A}"/>
+                <a16:creationId xmlns:a16="http://schemas.microsoft.com/office/drawing/2014/main" id="{F39D5695-A126-7220-7B4F-564FABACEC67}"/>
               </a:ext>
             </a:extLst>
           </p:cNvPr>
@@ -1691,7 +1691,7 @@
           <p:cNvPr id="3" name="テキスト プレースホルダー 2">
             <a:extLst>
               <a:ext uri="{FF2B5EF4-FFF2-40B4-BE49-F238E27FC236}">
-                <a16:creationId xmlns:a16="http://schemas.microsoft.com/office/drawing/2014/main" id="{604DBC8A-7812-B5B7-1721-C3B0EAE6A301}"/>
+                <a16:creationId xmlns:a16="http://schemas.microsoft.com/office/drawing/2014/main" id="{C22E487F-865E-1ED9-C180-4EE72D43C650}"/>
               </a:ext>
             </a:extLst>
           </p:cNvPr>
@@ -1762,7 +1762,7 @@
           <p:cNvPr id="4" name="コンテンツ プレースホルダー 3">
             <a:extLst>
               <a:ext uri="{FF2B5EF4-FFF2-40B4-BE49-F238E27FC236}">
-                <a16:creationId xmlns:a16="http://schemas.microsoft.com/office/drawing/2014/main" id="{E2E02E61-9015-9739-04AA-6AE6BE8B9F5A}"/>
+                <a16:creationId xmlns:a16="http://schemas.microsoft.com/office/drawing/2014/main" id="{377DDE08-459C-B02C-F626-227AE26AFEC2}"/>
               </a:ext>
             </a:extLst>
           </p:cNvPr>
@@ -1856,7 +1856,7 @@
           <p:cNvPr id="5" name="テキスト プレースホルダー 4">
             <a:extLst>
               <a:ext uri="{FF2B5EF4-FFF2-40B4-BE49-F238E27FC236}">
-                <a16:creationId xmlns:a16="http://schemas.microsoft.com/office/drawing/2014/main" id="{BD2C66EA-4ADA-1223-2D1D-BDD94645D526}"/>
+                <a16:creationId xmlns:a16="http://schemas.microsoft.com/office/drawing/2014/main" id="{5D40F0E0-B0E7-7B19-786C-F0A061772704}"/>
               </a:ext>
             </a:extLst>
           </p:cNvPr>
@@ -1927,7 +1927,7 @@
           <p:cNvPr id="6" name="コンテンツ プレースホルダー 5">
             <a:extLst>
               <a:ext uri="{FF2B5EF4-FFF2-40B4-BE49-F238E27FC236}">
-                <a16:creationId xmlns:a16="http://schemas.microsoft.com/office/drawing/2014/main" id="{DF423063-D1C3-BAFB-485C-D8345EB86671}"/>
+                <a16:creationId xmlns:a16="http://schemas.microsoft.com/office/drawing/2014/main" id="{BA027968-45DC-2118-75FD-14F7713F8E8E}"/>
               </a:ext>
             </a:extLst>
           </p:cNvPr>
@@ -2021,7 +2021,7 @@
           <p:cNvPr id="7" name="日付プレースホルダー 6">
             <a:extLst>
               <a:ext uri="{FF2B5EF4-FFF2-40B4-BE49-F238E27FC236}">
-                <a16:creationId xmlns:a16="http://schemas.microsoft.com/office/drawing/2014/main" id="{C07C68B9-CEFA-6937-B2FF-508F965836C5}"/>
+                <a16:creationId xmlns:a16="http://schemas.microsoft.com/office/drawing/2014/main" id="{5FBCE709-022E-AC12-DF80-BC2996FECE4B}"/>
               </a:ext>
             </a:extLst>
           </p:cNvPr>
@@ -2037,7 +2037,7 @@
           <a:bodyPr/>
           <a:lstStyle/>
           <a:p>
-            <a:fld id="{DB0110F2-E0DB-4B37-B3E7-8325D69EFD10}" type="datetimeFigureOut">
+            <a:fld id="{EDA80CF3-97CF-41C8-B522-D06A973D3A44}" type="datetimeFigureOut">
               <a:rPr kumimoji="1" lang="ja-JP" altLang="en-US" smtClean="0"/>
               <a:t>2026/7/30</a:t>
             </a:fld>
@@ -2050,7 +2050,7 @@
           <p:cNvPr id="8" name="フッター プレースホルダー 7">
             <a:extLst>
               <a:ext uri="{FF2B5EF4-FFF2-40B4-BE49-F238E27FC236}">
-                <a16:creationId xmlns:a16="http://schemas.microsoft.com/office/drawing/2014/main" id="{F821061D-C4DC-0BB4-4BCB-60071552BEF6}"/>
+                <a16:creationId xmlns:a16="http://schemas.microsoft.com/office/drawing/2014/main" id="{5992CC75-B899-B5E2-532B-D33457DCA73B}"/>
               </a:ext>
             </a:extLst>
           </p:cNvPr>
@@ -2075,7 +2075,7 @@
           <p:cNvPr id="9" name="スライド番号プレースホルダー 8">
             <a:extLst>
               <a:ext uri="{FF2B5EF4-FFF2-40B4-BE49-F238E27FC236}">
-                <a16:creationId xmlns:a16="http://schemas.microsoft.com/office/drawing/2014/main" id="{3C73B8C6-C85C-6E3C-FA9A-AF3282B579A5}"/>
+                <a16:creationId xmlns:a16="http://schemas.microsoft.com/office/drawing/2014/main" id="{03AB6AD5-A977-52DC-712F-42FC194964B7}"/>
               </a:ext>
             </a:extLst>
           </p:cNvPr>
@@ -2091,7 +2091,7 @@
           <a:bodyPr/>
           <a:lstStyle/>
           <a:p>
-            <a:fld id="{EE5077F7-6B8A-4C44-A0FF-72090273D9A4}" type="slidenum">
+            <a:fld id="{8F9E6F0C-AD0F-4915-A7B1-7B0B363ED78D}" type="slidenum">
               <a:rPr kumimoji="1" lang="ja-JP" altLang="en-US" smtClean="0"/>
               <a:t>‹#›</a:t>
             </a:fld>
@@ -2102,7 +2102,7 @@
     </p:spTree>
     <p:extLst>
       <p:ext uri="{BB962C8B-B14F-4D97-AF65-F5344CB8AC3E}">
-        <p14:creationId xmlns:p14="http://schemas.microsoft.com/office/powerpoint/2010/main" val="59233168"/>
+        <p14:creationId xmlns:p14="http://schemas.microsoft.com/office/powerpoint/2010/main" val="1442157507"/>
       </p:ext>
     </p:extLst>
   </p:cSld>
@@ -2134,7 +2134,7 @@
           <p:cNvPr id="2" name="タイトル 1">
             <a:extLst>
               <a:ext uri="{FF2B5EF4-FFF2-40B4-BE49-F238E27FC236}">
-                <a16:creationId xmlns:a16="http://schemas.microsoft.com/office/drawing/2014/main" id="{075F8BD7-7A9D-FF70-DC37-3472124FA604}"/>
+                <a16:creationId xmlns:a16="http://schemas.microsoft.com/office/drawing/2014/main" id="{B8103D84-7664-7965-4C3A-8CE0AB579AF2}"/>
               </a:ext>
             </a:extLst>
           </p:cNvPr>
@@ -2162,7 +2162,7 @@
           <p:cNvPr id="3" name="日付プレースホルダー 2">
             <a:extLst>
               <a:ext uri="{FF2B5EF4-FFF2-40B4-BE49-F238E27FC236}">
-                <a16:creationId xmlns:a16="http://schemas.microsoft.com/office/drawing/2014/main" id="{D53A220B-F8A8-A3D2-BE93-CCA8F34A635D}"/>
+                <a16:creationId xmlns:a16="http://schemas.microsoft.com/office/drawing/2014/main" id="{D597AC14-0653-1583-A066-824DE05F3236}"/>
               </a:ext>
             </a:extLst>
           </p:cNvPr>
@@ -2178,7 +2178,7 @@
           <a:bodyPr/>
           <a:lstStyle/>
           <a:p>
-            <a:fld id="{DB0110F2-E0DB-4B37-B3E7-8325D69EFD10}" type="datetimeFigureOut">
+            <a:fld id="{EDA80CF3-97CF-41C8-B522-D06A973D3A44}" type="datetimeFigureOut">
               <a:rPr kumimoji="1" lang="ja-JP" altLang="en-US" smtClean="0"/>
               <a:t>2026/7/30</a:t>
             </a:fld>
@@ -2191,7 +2191,7 @@
           <p:cNvPr id="4" name="フッター プレースホルダー 3">
             <a:extLst>
               <a:ext uri="{FF2B5EF4-FFF2-40B4-BE49-F238E27FC236}">
-                <a16:creationId xmlns:a16="http://schemas.microsoft.com/office/drawing/2014/main" id="{17DD045E-6AAB-99E9-44F0-BF04AB2F9E78}"/>
+                <a16:creationId xmlns:a16="http://schemas.microsoft.com/office/drawing/2014/main" id="{6B3A7C90-0CD6-7A56-AD0B-933BC87DE326}"/>
               </a:ext>
             </a:extLst>
           </p:cNvPr>
@@ -2216,7 +2216,7 @@
           <p:cNvPr id="5" name="スライド番号プレースホルダー 4">
             <a:extLst>
               <a:ext uri="{FF2B5EF4-FFF2-40B4-BE49-F238E27FC236}">
-                <a16:creationId xmlns:a16="http://schemas.microsoft.com/office/drawing/2014/main" id="{BCDC66A9-E28B-1794-4B74-5C8B361A0BE9}"/>
+                <a16:creationId xmlns:a16="http://schemas.microsoft.com/office/drawing/2014/main" id="{76259E97-06D5-0284-F288-593EE3B95C3D}"/>
               </a:ext>
             </a:extLst>
           </p:cNvPr>
@@ -2232,7 +2232,7 @@
           <a:bodyPr/>
           <a:lstStyle/>
           <a:p>
-            <a:fld id="{EE5077F7-6B8A-4C44-A0FF-72090273D9A4}" type="slidenum">
+            <a:fld id="{8F9E6F0C-AD0F-4915-A7B1-7B0B363ED78D}" type="slidenum">
               <a:rPr kumimoji="1" lang="ja-JP" altLang="en-US" smtClean="0"/>
               <a:t>‹#›</a:t>
             </a:fld>
@@ -2243,7 +2243,7 @@
     </p:spTree>
     <p:extLst>
       <p:ext uri="{BB962C8B-B14F-4D97-AF65-F5344CB8AC3E}">
-        <p14:creationId xmlns:p14="http://schemas.microsoft.com/office/powerpoint/2010/main" val="682392964"/>
+        <p14:creationId xmlns:p14="http://schemas.microsoft.com/office/powerpoint/2010/main" val="1600834330"/>
       </p:ext>
     </p:extLst>
   </p:cSld>
@@ -2275,7 +2275,7 @@
           <p:cNvPr id="2" name="日付プレースホルダー 1">
             <a:extLst>
               <a:ext uri="{FF2B5EF4-FFF2-40B4-BE49-F238E27FC236}">
-                <a16:creationId xmlns:a16="http://schemas.microsoft.com/office/drawing/2014/main" id="{602201AE-A2AC-B86F-8C48-EAD459257F3F}"/>
+                <a16:creationId xmlns:a16="http://schemas.microsoft.com/office/drawing/2014/main" id="{66A67CE1-B778-6A0B-29F5-3FFA89BDAF23}"/>
               </a:ext>
             </a:extLst>
           </p:cNvPr>
@@ -2291,7 +2291,7 @@
           <a:bodyPr/>
           <a:lstStyle/>
           <a:p>
-            <a:fld id="{DB0110F2-E0DB-4B37-B3E7-8325D69EFD10}" type="datetimeFigureOut">
+            <a:fld id="{EDA80CF3-97CF-41C8-B522-D06A973D3A44}" type="datetimeFigureOut">
               <a:rPr kumimoji="1" lang="ja-JP" altLang="en-US" smtClean="0"/>
               <a:t>2026/7/30</a:t>
             </a:fld>
@@ -2304,7 +2304,7 @@
           <p:cNvPr id="3" name="フッター プレースホルダー 2">
             <a:extLst>
               <a:ext uri="{FF2B5EF4-FFF2-40B4-BE49-F238E27FC236}">
-                <a16:creationId xmlns:a16="http://schemas.microsoft.com/office/drawing/2014/main" id="{4356B662-8EA7-BAC7-DFF0-F320265CA629}"/>
+                <a16:creationId xmlns:a16="http://schemas.microsoft.com/office/drawing/2014/main" id="{906AAA5F-BBE6-F527-F626-787A3DCC182C}"/>
               </a:ext>
             </a:extLst>
           </p:cNvPr>
@@ -2329,7 +2329,7 @@
           <p:cNvPr id="4" name="スライド番号プレースホルダー 3">
             <a:extLst>
               <a:ext uri="{FF2B5EF4-FFF2-40B4-BE49-F238E27FC236}">
-                <a16:creationId xmlns:a16="http://schemas.microsoft.com/office/drawing/2014/main" id="{15119BF5-369F-9505-B6D0-757D99348000}"/>
+                <a16:creationId xmlns:a16="http://schemas.microsoft.com/office/drawing/2014/main" id="{8ACAB3F8-F97B-04D2-E33B-2DCE62C211F5}"/>
               </a:ext>
             </a:extLst>
           </p:cNvPr>
@@ -2345,7 +2345,7 @@
           <a:bodyPr/>
           <a:lstStyle/>
           <a:p>
-            <a:fld id="{EE5077F7-6B8A-4C44-A0FF-72090273D9A4}" type="slidenum">
+            <a:fld id="{8F9E6F0C-AD0F-4915-A7B1-7B0B363ED78D}" type="slidenum">
               <a:rPr kumimoji="1" lang="ja-JP" altLang="en-US" smtClean="0"/>
               <a:t>‹#›</a:t>
             </a:fld>
@@ -2356,7 +2356,7 @@
     </p:spTree>
     <p:extLst>
       <p:ext uri="{BB962C8B-B14F-4D97-AF65-F5344CB8AC3E}">
-        <p14:creationId xmlns:p14="http://schemas.microsoft.com/office/powerpoint/2010/main" val="963016360"/>
+        <p14:creationId xmlns:p14="http://schemas.microsoft.com/office/powerpoint/2010/main" val="3490000878"/>
       </p:ext>
     </p:extLst>
   </p:cSld>
@@ -2388,7 +2388,7 @@
           <p:cNvPr id="2" name="タイトル 1">
             <a:extLst>
               <a:ext uri="{FF2B5EF4-FFF2-40B4-BE49-F238E27FC236}">
-                <a16:creationId xmlns:a16="http://schemas.microsoft.com/office/drawing/2014/main" id="{50E25337-6867-EC86-6DB4-C46C09D9F75D}"/>
+                <a16:creationId xmlns:a16="http://schemas.microsoft.com/office/drawing/2014/main" id="{6B5802F4-75D4-EA83-7D65-8A5B70E52574}"/>
               </a:ext>
             </a:extLst>
           </p:cNvPr>
@@ -2425,7 +2425,7 @@
           <p:cNvPr id="3" name="コンテンツ プレースホルダー 2">
             <a:extLst>
               <a:ext uri="{FF2B5EF4-FFF2-40B4-BE49-F238E27FC236}">
-                <a16:creationId xmlns:a16="http://schemas.microsoft.com/office/drawing/2014/main" id="{6C761D96-AE2F-CF7D-79F3-84B0AF229671}"/>
+                <a16:creationId xmlns:a16="http://schemas.microsoft.com/office/drawing/2014/main" id="{B1B498C4-EFAB-EC68-ED4A-83153CBDD2F6}"/>
               </a:ext>
             </a:extLst>
           </p:cNvPr>
@@ -2547,7 +2547,7 @@
           <p:cNvPr id="4" name="テキスト プレースホルダー 3">
             <a:extLst>
               <a:ext uri="{FF2B5EF4-FFF2-40B4-BE49-F238E27FC236}">
-                <a16:creationId xmlns:a16="http://schemas.microsoft.com/office/drawing/2014/main" id="{DCCFC9AD-ADB2-F11C-0B40-20915B0EBA65}"/>
+                <a16:creationId xmlns:a16="http://schemas.microsoft.com/office/drawing/2014/main" id="{2D069ADF-A58F-3134-2AD2-8E85E49C2562}"/>
               </a:ext>
             </a:extLst>
           </p:cNvPr>
@@ -2618,7 +2618,7 @@
           <p:cNvPr id="5" name="日付プレースホルダー 4">
             <a:extLst>
               <a:ext uri="{FF2B5EF4-FFF2-40B4-BE49-F238E27FC236}">
-                <a16:creationId xmlns:a16="http://schemas.microsoft.com/office/drawing/2014/main" id="{AA197E49-009F-648F-54B3-58776C0018A7}"/>
+                <a16:creationId xmlns:a16="http://schemas.microsoft.com/office/drawing/2014/main" id="{C3D258C2-A3CA-2EE9-1007-C3834F0965B0}"/>
               </a:ext>
             </a:extLst>
           </p:cNvPr>
@@ -2634,7 +2634,7 @@
           <a:bodyPr/>
           <a:lstStyle/>
           <a:p>
-            <a:fld id="{DB0110F2-E0DB-4B37-B3E7-8325D69EFD10}" type="datetimeFigureOut">
+            <a:fld id="{EDA80CF3-97CF-41C8-B522-D06A973D3A44}" type="datetimeFigureOut">
               <a:rPr kumimoji="1" lang="ja-JP" altLang="en-US" smtClean="0"/>
               <a:t>2026/7/30</a:t>
             </a:fld>
@@ -2647,7 +2647,7 @@
           <p:cNvPr id="6" name="フッター プレースホルダー 5">
             <a:extLst>
               <a:ext uri="{FF2B5EF4-FFF2-40B4-BE49-F238E27FC236}">
-                <a16:creationId xmlns:a16="http://schemas.microsoft.com/office/drawing/2014/main" id="{591AAC56-8FDF-F76D-A2C7-BC5CE32F25B6}"/>
+                <a16:creationId xmlns:a16="http://schemas.microsoft.com/office/drawing/2014/main" id="{03DDDF68-EA4C-BEA6-895C-00900C05F444}"/>
               </a:ext>
             </a:extLst>
           </p:cNvPr>
@@ -2672,7 +2672,7 @@
           <p:cNvPr id="7" name="スライド番号プレースホルダー 6">
             <a:extLst>
               <a:ext uri="{FF2B5EF4-FFF2-40B4-BE49-F238E27FC236}">
-                <a16:creationId xmlns:a16="http://schemas.microsoft.com/office/drawing/2014/main" id="{B6F7FE47-B19C-7BA1-D75E-CBCA69D87B50}"/>
+                <a16:creationId xmlns:a16="http://schemas.microsoft.com/office/drawing/2014/main" id="{6AA76F60-0A09-3EBF-DD1F-14693112020F}"/>
               </a:ext>
             </a:extLst>
           </p:cNvPr>
@@ -2688,7 +2688,7 @@
           <a:bodyPr/>
           <a:lstStyle/>
           <a:p>
-            <a:fld id="{EE5077F7-6B8A-4C44-A0FF-72090273D9A4}" type="slidenum">
+            <a:fld id="{8F9E6F0C-AD0F-4915-A7B1-7B0B363ED78D}" type="slidenum">
               <a:rPr kumimoji="1" lang="ja-JP" altLang="en-US" smtClean="0"/>
               <a:t>‹#›</a:t>
             </a:fld>
@@ -2699,7 +2699,7 @@
     </p:spTree>
     <p:extLst>
       <p:ext uri="{BB962C8B-B14F-4D97-AF65-F5344CB8AC3E}">
-        <p14:creationId xmlns:p14="http://schemas.microsoft.com/office/powerpoint/2010/main" val="1240170326"/>
+        <p14:creationId xmlns:p14="http://schemas.microsoft.com/office/powerpoint/2010/main" val="1618458336"/>
       </p:ext>
     </p:extLst>
   </p:cSld>
@@ -2731,7 +2731,7 @@
           <p:cNvPr id="2" name="タイトル 1">
             <a:extLst>
               <a:ext uri="{FF2B5EF4-FFF2-40B4-BE49-F238E27FC236}">
-                <a16:creationId xmlns:a16="http://schemas.microsoft.com/office/drawing/2014/main" id="{DD7941B3-C7B0-EAAA-4094-0B6B235903E4}"/>
+                <a16:creationId xmlns:a16="http://schemas.microsoft.com/office/drawing/2014/main" id="{0D1199DE-4032-9953-5EC7-D13E889A53EC}"/>
               </a:ext>
             </a:extLst>
           </p:cNvPr>
@@ -2768,7 +2768,7 @@
           <p:cNvPr id="3" name="図プレースホルダー 2">
             <a:extLst>
               <a:ext uri="{FF2B5EF4-FFF2-40B4-BE49-F238E27FC236}">
-                <a16:creationId xmlns:a16="http://schemas.microsoft.com/office/drawing/2014/main" id="{7026ABF3-2316-A549-BC09-7990D913D062}"/>
+                <a16:creationId xmlns:a16="http://schemas.microsoft.com/office/drawing/2014/main" id="{257E9F69-FE2F-0E5E-D170-18EE2788F62F}"/>
               </a:ext>
             </a:extLst>
           </p:cNvPr>
@@ -2835,7 +2835,7 @@
           <p:cNvPr id="4" name="テキスト プレースホルダー 3">
             <a:extLst>
               <a:ext uri="{FF2B5EF4-FFF2-40B4-BE49-F238E27FC236}">
-                <a16:creationId xmlns:a16="http://schemas.microsoft.com/office/drawing/2014/main" id="{7A9401D7-C2BB-4A2E-90E6-61BCB8717B3B}"/>
+                <a16:creationId xmlns:a16="http://schemas.microsoft.com/office/drawing/2014/main" id="{04B67631-742E-3642-92D6-0B98FD69A661}"/>
               </a:ext>
             </a:extLst>
           </p:cNvPr>
@@ -2906,7 +2906,7 @@
           <p:cNvPr id="5" name="日付プレースホルダー 4">
             <a:extLst>
               <a:ext uri="{FF2B5EF4-FFF2-40B4-BE49-F238E27FC236}">
-                <a16:creationId xmlns:a16="http://schemas.microsoft.com/office/drawing/2014/main" id="{ADF4AC16-EC19-DADE-0053-16F4A4BC2DA4}"/>
+                <a16:creationId xmlns:a16="http://schemas.microsoft.com/office/drawing/2014/main" id="{819C2AC9-D3CA-4334-0D02-366E5BF8A4D9}"/>
               </a:ext>
             </a:extLst>
           </p:cNvPr>
@@ -2922,7 +2922,7 @@
           <a:bodyPr/>
           <a:lstStyle/>
           <a:p>
-            <a:fld id="{DB0110F2-E0DB-4B37-B3E7-8325D69EFD10}" type="datetimeFigureOut">
+            <a:fld id="{EDA80CF3-97CF-41C8-B522-D06A973D3A44}" type="datetimeFigureOut">
               <a:rPr kumimoji="1" lang="ja-JP" altLang="en-US" smtClean="0"/>
               <a:t>2026/7/30</a:t>
             </a:fld>
@@ -2935,7 +2935,7 @@
           <p:cNvPr id="6" name="フッター プレースホルダー 5">
             <a:extLst>
               <a:ext uri="{FF2B5EF4-FFF2-40B4-BE49-F238E27FC236}">
-                <a16:creationId xmlns:a16="http://schemas.microsoft.com/office/drawing/2014/main" id="{2940A2F5-9AE2-86AD-05EE-3FFA2409E377}"/>
+                <a16:creationId xmlns:a16="http://schemas.microsoft.com/office/drawing/2014/main" id="{4A1C9675-C92D-6D50-BBB1-E72B9273B4A7}"/>
               </a:ext>
             </a:extLst>
           </p:cNvPr>
@@ -2960,7 +2960,7 @@
           <p:cNvPr id="7" name="スライド番号プレースホルダー 6">
             <a:extLst>
               <a:ext uri="{FF2B5EF4-FFF2-40B4-BE49-F238E27FC236}">
-                <a16:creationId xmlns:a16="http://schemas.microsoft.com/office/drawing/2014/main" id="{73084446-D3C9-F7D4-32C7-5BAC00538374}"/>
+                <a16:creationId xmlns:a16="http://schemas.microsoft.com/office/drawing/2014/main" id="{691F16D3-3004-9D20-12DF-1B0786D59946}"/>
               </a:ext>
             </a:extLst>
           </p:cNvPr>
@@ -2976,7 +2976,7 @@
           <a:bodyPr/>
           <a:lstStyle/>
           <a:p>
-            <a:fld id="{EE5077F7-6B8A-4C44-A0FF-72090273D9A4}" type="slidenum">
+            <a:fld id="{8F9E6F0C-AD0F-4915-A7B1-7B0B363ED78D}" type="slidenum">
               <a:rPr kumimoji="1" lang="ja-JP" altLang="en-US" smtClean="0"/>
               <a:t>‹#›</a:t>
             </a:fld>
@@ -2987,7 +2987,7 @@
     </p:spTree>
     <p:extLst>
       <p:ext uri="{BB962C8B-B14F-4D97-AF65-F5344CB8AC3E}">
-        <p14:creationId xmlns:p14="http://schemas.microsoft.com/office/powerpoint/2010/main" val="828390996"/>
+        <p14:creationId xmlns:p14="http://schemas.microsoft.com/office/powerpoint/2010/main" val="369624043"/>
       </p:ext>
     </p:extLst>
   </p:cSld>
@@ -3024,7 +3024,7 @@
           <p:cNvPr id="2" name="タイトル プレースホルダー 1">
             <a:extLst>
               <a:ext uri="{FF2B5EF4-FFF2-40B4-BE49-F238E27FC236}">
-                <a16:creationId xmlns:a16="http://schemas.microsoft.com/office/drawing/2014/main" id="{28B3A4B7-28B3-3C39-D743-144C7BFF8E6E}"/>
+                <a16:creationId xmlns:a16="http://schemas.microsoft.com/office/drawing/2014/main" id="{A11823F7-ABA9-B165-4107-FC067EAF9E08}"/>
               </a:ext>
             </a:extLst>
           </p:cNvPr>
@@ -3062,7 +3062,7 @@
           <p:cNvPr id="3" name="テキスト プレースホルダー 2">
             <a:extLst>
               <a:ext uri="{FF2B5EF4-FFF2-40B4-BE49-F238E27FC236}">
-                <a16:creationId xmlns:a16="http://schemas.microsoft.com/office/drawing/2014/main" id="{598CC734-F599-8831-3D32-CB8EC56ACE26}"/>
+                <a16:creationId xmlns:a16="http://schemas.microsoft.com/office/drawing/2014/main" id="{700C3902-397A-811A-EC70-39A21BAE2EE9}"/>
               </a:ext>
             </a:extLst>
           </p:cNvPr>
@@ -3161,7 +3161,7 @@
           <p:cNvPr id="4" name="日付プレースホルダー 3">
             <a:extLst>
               <a:ext uri="{FF2B5EF4-FFF2-40B4-BE49-F238E27FC236}">
-                <a16:creationId xmlns:a16="http://schemas.microsoft.com/office/drawing/2014/main" id="{583A5BE6-4238-1190-43D1-700D47B8FB36}"/>
+                <a16:creationId xmlns:a16="http://schemas.microsoft.com/office/drawing/2014/main" id="{06BB5D49-C909-98D8-68C4-607E76B37B2E}"/>
               </a:ext>
             </a:extLst>
           </p:cNvPr>
@@ -3195,7 +3195,7 @@
             </a:lvl1pPr>
           </a:lstStyle>
           <a:p>
-            <a:fld id="{DB0110F2-E0DB-4B37-B3E7-8325D69EFD10}" type="datetimeFigureOut">
+            <a:fld id="{EDA80CF3-97CF-41C8-B522-D06A973D3A44}" type="datetimeFigureOut">
               <a:rPr kumimoji="1" lang="ja-JP" altLang="en-US" smtClean="0"/>
               <a:t>2026/7/30</a:t>
             </a:fld>
@@ -3208,7 +3208,7 @@
           <p:cNvPr id="5" name="フッター プレースホルダー 4">
             <a:extLst>
               <a:ext uri="{FF2B5EF4-FFF2-40B4-BE49-F238E27FC236}">
-                <a16:creationId xmlns:a16="http://schemas.microsoft.com/office/drawing/2014/main" id="{C3DE56EF-76F4-DCB2-2CCB-8E4398EF9EC9}"/>
+                <a16:creationId xmlns:a16="http://schemas.microsoft.com/office/drawing/2014/main" id="{582613E3-2387-1059-6573-B08E0DB41C68}"/>
               </a:ext>
             </a:extLst>
           </p:cNvPr>
@@ -3251,7 +3251,7 @@
           <p:cNvPr id="6" name="スライド番号プレースホルダー 5">
             <a:extLst>
               <a:ext uri="{FF2B5EF4-FFF2-40B4-BE49-F238E27FC236}">
-                <a16:creationId xmlns:a16="http://schemas.microsoft.com/office/drawing/2014/main" id="{771B9346-25E8-BA27-1688-D1553586D5EA}"/>
+                <a16:creationId xmlns:a16="http://schemas.microsoft.com/office/drawing/2014/main" id="{3E874044-CB9D-48BA-7D6E-F31A3E671C5C}"/>
               </a:ext>
             </a:extLst>
           </p:cNvPr>
@@ -3285,7 +3285,7 @@
             </a:lvl1pPr>
           </a:lstStyle>
           <a:p>
-            <a:fld id="{EE5077F7-6B8A-4C44-A0FF-72090273D9A4}" type="slidenum">
+            <a:fld id="{8F9E6F0C-AD0F-4915-A7B1-7B0B363ED78D}" type="slidenum">
               <a:rPr kumimoji="1" lang="ja-JP" altLang="en-US" smtClean="0"/>
               <a:t>‹#›</a:t>
             </a:fld>
@@ -3296,7 +3296,7 @@
     </p:spTree>
     <p:extLst>
       <p:ext uri="{BB962C8B-B14F-4D97-AF65-F5344CB8AC3E}">
-        <p14:creationId xmlns:p14="http://schemas.microsoft.com/office/powerpoint/2010/main" val="629767936"/>
+        <p14:creationId xmlns:p14="http://schemas.microsoft.com/office/powerpoint/2010/main" val="2958021953"/>
       </p:ext>
     </p:extLst>
   </p:cSld>
@@ -3619,7 +3619,7 @@
           <p:cNvPr id="2" name="テキスト ボックス 1">
             <a:extLst>
               <a:ext uri="{FF2B5EF4-FFF2-40B4-BE49-F238E27FC236}">
-                <a16:creationId xmlns:a16="http://schemas.microsoft.com/office/drawing/2014/main" id="{26830576-F8C7-23A6-E2EF-ECF5B3C8A322}"/>
+                <a16:creationId xmlns:a16="http://schemas.microsoft.com/office/drawing/2014/main" id="{C8FF4611-90B7-00E5-E49D-C621BB4EC951}"/>
               </a:ext>
             </a:extLst>
           </p:cNvPr>
@@ -3665,7 +3665,7 @@
           <p:cNvPr id="3" name="テキスト ボックス 2">
             <a:extLst>
               <a:ext uri="{FF2B5EF4-FFF2-40B4-BE49-F238E27FC236}">
-                <a16:creationId xmlns:a16="http://schemas.microsoft.com/office/drawing/2014/main" id="{5E4119A7-98D7-4CFC-8E6B-5D438A63AB13}"/>
+                <a16:creationId xmlns:a16="http://schemas.microsoft.com/office/drawing/2014/main" id="{5745FE31-8026-9D80-5778-E58DB8057BA8}"/>
               </a:ext>
             </a:extLst>
           </p:cNvPr>
@@ -3714,7 +3714,7 @@
           <p:cNvPr id="4" name="テキスト ボックス 3">
             <a:extLst>
               <a:ext uri="{FF2B5EF4-FFF2-40B4-BE49-F238E27FC236}">
-                <a16:creationId xmlns:a16="http://schemas.microsoft.com/office/drawing/2014/main" id="{E27634A9-AC4C-2A9A-3316-D741EC64F6F8}"/>
+                <a16:creationId xmlns:a16="http://schemas.microsoft.com/office/drawing/2014/main" id="{670EA47F-7E2A-810E-4965-92A2C92ABA9B}"/>
               </a:ext>
             </a:extLst>
           </p:cNvPr>
@@ -3754,7 +3754,7 @@
           <p:cNvPr id="5" name="テキスト ボックス 4">
             <a:extLst>
               <a:ext uri="{FF2B5EF4-FFF2-40B4-BE49-F238E27FC236}">
-                <a16:creationId xmlns:a16="http://schemas.microsoft.com/office/drawing/2014/main" id="{53CF4092-DB47-8474-01A9-0941EDCD2484}"/>
+                <a16:creationId xmlns:a16="http://schemas.microsoft.com/office/drawing/2014/main" id="{571AE1D5-FD9E-6643-7428-0C1241D21D35}"/>
               </a:ext>
             </a:extLst>
           </p:cNvPr>
@@ -3801,7 +3801,7 @@
             <a:hlinkClick r:id="" action="ppaction://media"/>
             <a:extLst>
               <a:ext uri="{FF2B5EF4-FFF2-40B4-BE49-F238E27FC236}">
-                <a16:creationId xmlns:a16="http://schemas.microsoft.com/office/drawing/2014/main" id="{77C02BD5-5384-DBC7-DEF0-E157371A8920}"/>
+                <a16:creationId xmlns:a16="http://schemas.microsoft.com/office/drawing/2014/main" id="{A693E4C9-FAE1-B1B0-F87F-C2A1B94CB8DF}"/>
               </a:ext>
             </a:extLst>
           </p:cNvPr>
@@ -3836,7 +3836,7 @@
     </p:spTree>
     <p:extLst>
       <p:ext uri="{BB962C8B-B14F-4D97-AF65-F5344CB8AC3E}">
-        <p14:creationId xmlns:p14="http://schemas.microsoft.com/office/powerpoint/2010/main" val="4294909771"/>
+        <p14:creationId xmlns:p14="http://schemas.microsoft.com/office/powerpoint/2010/main" val="773493459"/>
       </p:ext>
     </p:extLst>
   </p:cSld>
@@ -3960,7 +3960,7 @@
           <p:cNvPr id="2" name="テキスト ボックス 1">
             <a:extLst>
               <a:ext uri="{FF2B5EF4-FFF2-40B4-BE49-F238E27FC236}">
-                <a16:creationId xmlns:a16="http://schemas.microsoft.com/office/drawing/2014/main" id="{37221C3C-8E4F-1A74-7CEC-0F71D4558F82}"/>
+                <a16:creationId xmlns:a16="http://schemas.microsoft.com/office/drawing/2014/main" id="{9A51FC47-3A0E-0708-1BEB-A9DD53DDE5D4}"/>
               </a:ext>
             </a:extLst>
           </p:cNvPr>
@@ -4006,7 +4006,7 @@
           <p:cNvPr id="3" name="テキスト ボックス 2">
             <a:extLst>
               <a:ext uri="{FF2B5EF4-FFF2-40B4-BE49-F238E27FC236}">
-                <a16:creationId xmlns:a16="http://schemas.microsoft.com/office/drawing/2014/main" id="{19056590-A84E-CF60-A02F-8A75B412FA2A}"/>
+                <a16:creationId xmlns:a16="http://schemas.microsoft.com/office/drawing/2014/main" id="{D4CD255A-1096-EF27-43DD-FF2DE78D9110}"/>
               </a:ext>
             </a:extLst>
           </p:cNvPr>
@@ -4046,7 +4046,7 @@
           <p:cNvPr id="4" name="テキスト ボックス 3">
             <a:extLst>
               <a:ext uri="{FF2B5EF4-FFF2-40B4-BE49-F238E27FC236}">
-                <a16:creationId xmlns:a16="http://schemas.microsoft.com/office/drawing/2014/main" id="{A3E3D07F-15C7-EBE4-0A1A-58360899BDBA}"/>
+                <a16:creationId xmlns:a16="http://schemas.microsoft.com/office/drawing/2014/main" id="{31BA0289-CEFE-9043-C9C3-85DBFAC2107B}"/>
               </a:ext>
             </a:extLst>
           </p:cNvPr>
@@ -4113,7 +4113,7 @@
           <p:cNvPr id="5" name="テキスト ボックス 4">
             <a:extLst>
               <a:ext uri="{FF2B5EF4-FFF2-40B4-BE49-F238E27FC236}">
-                <a16:creationId xmlns:a16="http://schemas.microsoft.com/office/drawing/2014/main" id="{7F7DF9DB-66DE-482F-E1E9-8F4CD77B8B88}"/>
+                <a16:creationId xmlns:a16="http://schemas.microsoft.com/office/drawing/2014/main" id="{AAF96666-328B-5755-2252-A96C91E65ACC}"/>
               </a:ext>
             </a:extLst>
           </p:cNvPr>
@@ -4160,7 +4160,7 @@
             <a:hlinkClick r:id="" action="ppaction://media"/>
             <a:extLst>
               <a:ext uri="{FF2B5EF4-FFF2-40B4-BE49-F238E27FC236}">
-                <a16:creationId xmlns:a16="http://schemas.microsoft.com/office/drawing/2014/main" id="{91D3AFF1-E809-5C76-49B0-98E9605B469D}"/>
+                <a16:creationId xmlns:a16="http://schemas.microsoft.com/office/drawing/2014/main" id="{ADF875FF-5886-CF97-4962-F4322DB2A990}"/>
               </a:ext>
             </a:extLst>
           </p:cNvPr>
@@ -4195,7 +4195,7 @@
     </p:spTree>
     <p:extLst>
       <p:ext uri="{BB962C8B-B14F-4D97-AF65-F5344CB8AC3E}">
-        <p14:creationId xmlns:p14="http://schemas.microsoft.com/office/powerpoint/2010/main" val="2457734183"/>
+        <p14:creationId xmlns:p14="http://schemas.microsoft.com/office/powerpoint/2010/main" val="3429850214"/>
       </p:ext>
     </p:extLst>
   </p:cSld>
@@ -4319,7 +4319,7 @@
           <p:cNvPr id="2" name="テキスト ボックス 1">
             <a:extLst>
               <a:ext uri="{FF2B5EF4-FFF2-40B4-BE49-F238E27FC236}">
-                <a16:creationId xmlns:a16="http://schemas.microsoft.com/office/drawing/2014/main" id="{EA30D82B-215E-FBA0-6339-004D6C05EF20}"/>
+                <a16:creationId xmlns:a16="http://schemas.microsoft.com/office/drawing/2014/main" id="{B11FE903-2C86-FA50-00B6-221A6D7F2976}"/>
               </a:ext>
             </a:extLst>
           </p:cNvPr>
@@ -4365,7 +4365,7 @@
           <p:cNvPr id="3" name="テキスト ボックス 2">
             <a:extLst>
               <a:ext uri="{FF2B5EF4-FFF2-40B4-BE49-F238E27FC236}">
-                <a16:creationId xmlns:a16="http://schemas.microsoft.com/office/drawing/2014/main" id="{D7A665C0-0482-D7F6-BA57-F62B81C8A283}"/>
+                <a16:creationId xmlns:a16="http://schemas.microsoft.com/office/drawing/2014/main" id="{2E3F5C89-CB1F-034A-83CB-042BA18A49EB}"/>
               </a:ext>
             </a:extLst>
           </p:cNvPr>
@@ -4405,7 +4405,7 @@
           <p:cNvPr id="4" name="テキスト ボックス 3">
             <a:extLst>
               <a:ext uri="{FF2B5EF4-FFF2-40B4-BE49-F238E27FC236}">
-                <a16:creationId xmlns:a16="http://schemas.microsoft.com/office/drawing/2014/main" id="{59347CD4-735A-544F-981A-C78D3BC01046}"/>
+                <a16:creationId xmlns:a16="http://schemas.microsoft.com/office/drawing/2014/main" id="{E24BD291-8731-44E8-C151-31A1569FDD82}"/>
               </a:ext>
             </a:extLst>
           </p:cNvPr>
@@ -4500,7 +4500,7 @@
           <p:cNvPr id="5" name="テキスト ボックス 4">
             <a:extLst>
               <a:ext uri="{FF2B5EF4-FFF2-40B4-BE49-F238E27FC236}">
-                <a16:creationId xmlns:a16="http://schemas.microsoft.com/office/drawing/2014/main" id="{32404777-693C-D3D3-F25B-87A7685402D1}"/>
+                <a16:creationId xmlns:a16="http://schemas.microsoft.com/office/drawing/2014/main" id="{4B6C5F3F-68DD-5C2C-E245-3F3C0FE80E94}"/>
               </a:ext>
             </a:extLst>
           </p:cNvPr>
@@ -4547,7 +4547,7 @@
             <a:hlinkClick r:id="" action="ppaction://media"/>
             <a:extLst>
               <a:ext uri="{FF2B5EF4-FFF2-40B4-BE49-F238E27FC236}">
-                <a16:creationId xmlns:a16="http://schemas.microsoft.com/office/drawing/2014/main" id="{9814A4B9-94E4-5BC2-F049-3B95FFB7B3BE}"/>
+                <a16:creationId xmlns:a16="http://schemas.microsoft.com/office/drawing/2014/main" id="{7424801A-43DE-A2D6-2F39-7A32C9C61E86}"/>
               </a:ext>
             </a:extLst>
           </p:cNvPr>
@@ -4582,7 +4582,7 @@
     </p:spTree>
     <p:extLst>
       <p:ext uri="{BB962C8B-B14F-4D97-AF65-F5344CB8AC3E}">
-        <p14:creationId xmlns:p14="http://schemas.microsoft.com/office/powerpoint/2010/main" val="2064213245"/>
+        <p14:creationId xmlns:p14="http://schemas.microsoft.com/office/powerpoint/2010/main" val="97508736"/>
       </p:ext>
     </p:extLst>
   </p:cSld>
@@ -4706,7 +4706,7 @@
           <p:cNvPr id="2" name="テキスト ボックス 1">
             <a:extLst>
               <a:ext uri="{FF2B5EF4-FFF2-40B4-BE49-F238E27FC236}">
-                <a16:creationId xmlns:a16="http://schemas.microsoft.com/office/drawing/2014/main" id="{87287AE0-5C35-5B5B-0C44-4D9D7DDDBEC7}"/>
+                <a16:creationId xmlns:a16="http://schemas.microsoft.com/office/drawing/2014/main" id="{481EE2E4-5E3A-7C07-5168-825C5461D48E}"/>
               </a:ext>
             </a:extLst>
           </p:cNvPr>
@@ -4752,7 +4752,7 @@
           <p:cNvPr id="3" name="テキスト ボックス 2">
             <a:extLst>
               <a:ext uri="{FF2B5EF4-FFF2-40B4-BE49-F238E27FC236}">
-                <a16:creationId xmlns:a16="http://schemas.microsoft.com/office/drawing/2014/main" id="{3B223A3A-2499-41AD-003A-51643676162E}"/>
+                <a16:creationId xmlns:a16="http://schemas.microsoft.com/office/drawing/2014/main" id="{88BEB7DC-09C5-260C-BBD9-BD093DA730AA}"/>
               </a:ext>
             </a:extLst>
           </p:cNvPr>
@@ -4792,7 +4792,7 @@
           <p:cNvPr id="4" name="テキスト ボックス 3">
             <a:extLst>
               <a:ext uri="{FF2B5EF4-FFF2-40B4-BE49-F238E27FC236}">
-                <a16:creationId xmlns:a16="http://schemas.microsoft.com/office/drawing/2014/main" id="{40536CD4-F2A7-36AF-4A7A-F32C2B279E81}"/>
+                <a16:creationId xmlns:a16="http://schemas.microsoft.com/office/drawing/2014/main" id="{FB00F6AF-37CC-C15B-CACF-49753F3A4FFD}"/>
               </a:ext>
             </a:extLst>
           </p:cNvPr>
@@ -4902,7 +4902,7 @@
           <p:cNvPr id="5" name="テキスト ボックス 4">
             <a:extLst>
               <a:ext uri="{FF2B5EF4-FFF2-40B4-BE49-F238E27FC236}">
-                <a16:creationId xmlns:a16="http://schemas.microsoft.com/office/drawing/2014/main" id="{A5D2AF40-28F7-E3C4-065F-37C1205F96F1}"/>
+                <a16:creationId xmlns:a16="http://schemas.microsoft.com/office/drawing/2014/main" id="{7C9AF01A-12E6-563A-96C3-8FDA7A4B6AAA}"/>
               </a:ext>
             </a:extLst>
           </p:cNvPr>
@@ -4949,7 +4949,7 @@
             <a:hlinkClick r:id="" action="ppaction://media"/>
             <a:extLst>
               <a:ext uri="{FF2B5EF4-FFF2-40B4-BE49-F238E27FC236}">
-                <a16:creationId xmlns:a16="http://schemas.microsoft.com/office/drawing/2014/main" id="{F38494A0-FCFB-C8DB-5F83-C901AD259B15}"/>
+                <a16:creationId xmlns:a16="http://schemas.microsoft.com/office/drawing/2014/main" id="{5D8DD181-47FF-0F45-EFE3-86119A75E01B}"/>
               </a:ext>
             </a:extLst>
           </p:cNvPr>
@@ -4984,7 +4984,7 @@
     </p:spTree>
     <p:extLst>
       <p:ext uri="{BB962C8B-B14F-4D97-AF65-F5344CB8AC3E}">
-        <p14:creationId xmlns:p14="http://schemas.microsoft.com/office/powerpoint/2010/main" val="58645581"/>
+        <p14:creationId xmlns:p14="http://schemas.microsoft.com/office/powerpoint/2010/main" val="1038183384"/>
       </p:ext>
     </p:extLst>
   </p:cSld>
@@ -5108,7 +5108,7 @@
           <p:cNvPr id="2" name="テキスト ボックス 1">
             <a:extLst>
               <a:ext uri="{FF2B5EF4-FFF2-40B4-BE49-F238E27FC236}">
-                <a16:creationId xmlns:a16="http://schemas.microsoft.com/office/drawing/2014/main" id="{F54E61B4-711F-E725-4CD4-8DB7E88FDEFE}"/>
+                <a16:creationId xmlns:a16="http://schemas.microsoft.com/office/drawing/2014/main" id="{C545D527-DB25-7940-315B-DECE5841436C}"/>
               </a:ext>
             </a:extLst>
           </p:cNvPr>
@@ -5154,7 +5154,7 @@
           <p:cNvPr id="3" name="テキスト ボックス 2">
             <a:extLst>
               <a:ext uri="{FF2B5EF4-FFF2-40B4-BE49-F238E27FC236}">
-                <a16:creationId xmlns:a16="http://schemas.microsoft.com/office/drawing/2014/main" id="{75F6D64D-4FA9-FAFA-CFB4-46F5CFE7FCA3}"/>
+                <a16:creationId xmlns:a16="http://schemas.microsoft.com/office/drawing/2014/main" id="{8FD2B0C0-1DD7-5189-5592-1660BA756CD9}"/>
               </a:ext>
             </a:extLst>
           </p:cNvPr>
@@ -5194,7 +5194,7 @@
           <p:cNvPr id="4" name="テキスト ボックス 3">
             <a:extLst>
               <a:ext uri="{FF2B5EF4-FFF2-40B4-BE49-F238E27FC236}">
-                <a16:creationId xmlns:a16="http://schemas.microsoft.com/office/drawing/2014/main" id="{91B1B7C8-E8F3-D972-43A8-7718A810330A}"/>
+                <a16:creationId xmlns:a16="http://schemas.microsoft.com/office/drawing/2014/main" id="{B31A5AD2-37A3-FC3D-EC90-513E26807378}"/>
               </a:ext>
             </a:extLst>
           </p:cNvPr>
@@ -5218,20 +5218,14 @@
           <a:lstStyle/>
           <a:p>
             <a:r>
-              <a:rPr kumimoji="1" lang="en-US" altLang="ja-JP" sz="2000">
+              <a:rPr kumimoji="1" lang="ja-JP" altLang="en-US" sz="2000">
                 <a:solidFill>
                   <a:srgbClr val="333333"/>
                 </a:solidFill>
                 <a:latin typeface="Arial" panose="020B0604020202020204" pitchFamily="34" charset="0"/>
               </a:rPr>
-              <a:t>Set dartspot domain</a:t>
-            </a:r>
-            <a:endParaRPr kumimoji="1" lang="ja-JP" altLang="en-US" sz="2000">
-              <a:solidFill>
-                <a:srgbClr val="333333"/>
-              </a:solidFill>
-              <a:latin typeface="Arial" panose="020B0604020202020204" pitchFamily="34" charset="0"/>
-            </a:endParaRPr>
+              <a:t>直近のコミットでは、実装の見直しと継続的な改善が行われました。</a:t>
+            </a:r>
           </a:p>
         </p:txBody>
       </p:sp>
@@ -5240,7 +5234,7 @@
           <p:cNvPr id="5" name="テキスト ボックス 4">
             <a:extLst>
               <a:ext uri="{FF2B5EF4-FFF2-40B4-BE49-F238E27FC236}">
-                <a16:creationId xmlns:a16="http://schemas.microsoft.com/office/drawing/2014/main" id="{EA68985D-9B5F-C402-B197-4FCD8B1E8A0C}"/>
+                <a16:creationId xmlns:a16="http://schemas.microsoft.com/office/drawing/2014/main" id="{A752FE15-F402-6CA9-A909-47403328A95A}"/>
               </a:ext>
             </a:extLst>
           </p:cNvPr>
@@ -5287,7 +5281,7 @@
             <a:hlinkClick r:id="" action="ppaction://media"/>
             <a:extLst>
               <a:ext uri="{FF2B5EF4-FFF2-40B4-BE49-F238E27FC236}">
-                <a16:creationId xmlns:a16="http://schemas.microsoft.com/office/drawing/2014/main" id="{A2FA724E-205D-7498-9E01-1FD79D407580}"/>
+                <a16:creationId xmlns:a16="http://schemas.microsoft.com/office/drawing/2014/main" id="{F5FEBC58-056C-0CEC-7BA9-FFF37816F5B6}"/>
               </a:ext>
             </a:extLst>
           </p:cNvPr>
@@ -5322,7 +5316,7 @@
     </p:spTree>
     <p:extLst>
       <p:ext uri="{BB962C8B-B14F-4D97-AF65-F5344CB8AC3E}">
-        <p14:creationId xmlns:p14="http://schemas.microsoft.com/office/powerpoint/2010/main" val="3098290844"/>
+        <p14:creationId xmlns:p14="http://schemas.microsoft.com/office/powerpoint/2010/main" val="1020504250"/>
       </p:ext>
     </p:extLst>
   </p:cSld>
@@ -5331,10 +5325,10 @@
   </p:clrMapOvr>
   <mc:AlternateContent xmlns:mc="http://schemas.openxmlformats.org/markup-compatibility/2006">
     <mc:Choice xmlns:p14="http://schemas.microsoft.com/office/powerpoint/2010/main" Requires="p14">
-      <p:transition spd="slow" p14:dur="2000" advTm="6000"/>
+      <p:transition spd="slow" p14:dur="2000" advTm="7000"/>
     </mc:Choice>
     <mc:Fallback>
-      <p:transition spd="slow" advTm="6000"/>
+      <p:transition spd="slow" advTm="7000"/>
     </mc:Fallback>
   </mc:AlternateContent>
   <p:timing>
@@ -5365,7 +5359,7 @@
                                   <p:childTnLst>
                                     <p:cmd type="call" cmd="playFrom(0.0)">
                                       <p:cBhvr>
-                                        <p:cTn id="6" dur="5932" fill="hold"/>
+                                        <p:cTn id="6" dur="6076" fill="hold"/>
                                         <p:tgtEl>
                                           <p:spTgt spid="6"/>
                                         </p:tgtEl>
@@ -5446,7 +5440,7 @@
           <p:cNvPr id="2" name="テキスト ボックス 1">
             <a:extLst>
               <a:ext uri="{FF2B5EF4-FFF2-40B4-BE49-F238E27FC236}">
-                <a16:creationId xmlns:a16="http://schemas.microsoft.com/office/drawing/2014/main" id="{2109499F-AF00-55A0-9623-6FBA5D661BE6}"/>
+                <a16:creationId xmlns:a16="http://schemas.microsoft.com/office/drawing/2014/main" id="{62204F01-776F-9F47-67FB-C1E4587532B9}"/>
               </a:ext>
             </a:extLst>
           </p:cNvPr>
@@ -5492,7 +5486,7 @@
           <p:cNvPr id="3" name="テキスト ボックス 2">
             <a:extLst>
               <a:ext uri="{FF2B5EF4-FFF2-40B4-BE49-F238E27FC236}">
-                <a16:creationId xmlns:a16="http://schemas.microsoft.com/office/drawing/2014/main" id="{5E7385F7-3445-8251-AF37-E8B3BA13C941}"/>
+                <a16:creationId xmlns:a16="http://schemas.microsoft.com/office/drawing/2014/main" id="{7807B669-74B2-ED8C-7C14-4BBB259CAF95}"/>
               </a:ext>
             </a:extLst>
           </p:cNvPr>
@@ -5532,7 +5526,7 @@
           <p:cNvPr id="4" name="テキスト ボックス 3">
             <a:extLst>
               <a:ext uri="{FF2B5EF4-FFF2-40B4-BE49-F238E27FC236}">
-                <a16:creationId xmlns:a16="http://schemas.microsoft.com/office/drawing/2014/main" id="{46C94EAF-0478-9EF6-63CC-CC907D0E4667}"/>
+                <a16:creationId xmlns:a16="http://schemas.microsoft.com/office/drawing/2014/main" id="{376F81C7-722A-15E1-AAF0-58815A97E88B}"/>
               </a:ext>
             </a:extLst>
           </p:cNvPr>
@@ -5597,7 +5591,7 @@
           <p:cNvPr id="5" name="テキスト ボックス 4">
             <a:extLst>
               <a:ext uri="{FF2B5EF4-FFF2-40B4-BE49-F238E27FC236}">
-                <a16:creationId xmlns:a16="http://schemas.microsoft.com/office/drawing/2014/main" id="{BFB8BFDF-17E7-4642-662B-12FCBDAE3436}"/>
+                <a16:creationId xmlns:a16="http://schemas.microsoft.com/office/drawing/2014/main" id="{B28F41D8-6D79-B811-3570-ED986F937BBA}"/>
               </a:ext>
             </a:extLst>
           </p:cNvPr>
@@ -5644,7 +5638,7 @@
             <a:hlinkClick r:id="" action="ppaction://media"/>
             <a:extLst>
               <a:ext uri="{FF2B5EF4-FFF2-40B4-BE49-F238E27FC236}">
-                <a16:creationId xmlns:a16="http://schemas.microsoft.com/office/drawing/2014/main" id="{02E3D4F6-CEB3-1416-C002-83DC5BD22B1A}"/>
+                <a16:creationId xmlns:a16="http://schemas.microsoft.com/office/drawing/2014/main" id="{401F7217-A074-714C-C9B7-295AF9E7CBC6}"/>
               </a:ext>
             </a:extLst>
           </p:cNvPr>
@@ -5679,7 +5673,7 @@
     </p:spTree>
     <p:extLst>
       <p:ext uri="{BB962C8B-B14F-4D97-AF65-F5344CB8AC3E}">
-        <p14:creationId xmlns:p14="http://schemas.microsoft.com/office/powerpoint/2010/main" val="568925537"/>
+        <p14:creationId xmlns:p14="http://schemas.microsoft.com/office/powerpoint/2010/main" val="1823652561"/>
       </p:ext>
     </p:extLst>
   </p:cSld>
